--- a/HINS_MCU_V3.41/doc/system_t .pptx
+++ b/HINS_MCU_V3.41/doc/system_t .pptx
@@ -7,6 +7,7 @@
   <p:sldIdLst>
     <p:sldId id="256" r:id="rId2"/>
     <p:sldId id="257" r:id="rId3"/>
+    <p:sldId id="258" r:id="rId4"/>
   </p:sldIdLst>
   <p:sldSz cx="12192000" cy="6858000"/>
   <p:notesSz cx="6858000" cy="9144000"/>
@@ -105,6 +106,11 @@
       </a:defRPr>
     </a:lvl9pPr>
   </p:defaultTextStyle>
+  <p:extLst>
+    <p:ext uri="{EFAFB233-063F-42B5-8137-9DF3F51BA10A}">
+      <p15:sldGuideLst xmlns:p15="http://schemas.microsoft.com/office/powerpoint/2012/main"/>
+    </p:ext>
+  </p:extLst>
 </p:presentation>
 </file>
 
@@ -255,7 +261,7 @@
           <a:p>
             <a:fld id="{0DB1651F-564A-4748-8CCE-693AE295D293}" type="datetimeFigureOut">
               <a:rPr lang="zh-TW" altLang="en-US" smtClean="0"/>
-              <a:t>2026/3/18</a:t>
+              <a:t>2026/3/19</a:t>
             </a:fld>
             <a:endParaRPr lang="zh-TW" altLang="en-US"/>
           </a:p>
@@ -453,7 +459,7 @@
           <a:p>
             <a:fld id="{0DB1651F-564A-4748-8CCE-693AE295D293}" type="datetimeFigureOut">
               <a:rPr lang="zh-TW" altLang="en-US" smtClean="0"/>
-              <a:t>2026/3/18</a:t>
+              <a:t>2026/3/19</a:t>
             </a:fld>
             <a:endParaRPr lang="zh-TW" altLang="en-US"/>
           </a:p>
@@ -661,7 +667,7 @@
           <a:p>
             <a:fld id="{0DB1651F-564A-4748-8CCE-693AE295D293}" type="datetimeFigureOut">
               <a:rPr lang="zh-TW" altLang="en-US" smtClean="0"/>
-              <a:t>2026/3/18</a:t>
+              <a:t>2026/3/19</a:t>
             </a:fld>
             <a:endParaRPr lang="zh-TW" altLang="en-US"/>
           </a:p>
@@ -859,7 +865,7 @@
           <a:p>
             <a:fld id="{0DB1651F-564A-4748-8CCE-693AE295D293}" type="datetimeFigureOut">
               <a:rPr lang="zh-TW" altLang="en-US" smtClean="0"/>
-              <a:t>2026/3/18</a:t>
+              <a:t>2026/3/19</a:t>
             </a:fld>
             <a:endParaRPr lang="zh-TW" altLang="en-US"/>
           </a:p>
@@ -1134,7 +1140,7 @@
           <a:p>
             <a:fld id="{0DB1651F-564A-4748-8CCE-693AE295D293}" type="datetimeFigureOut">
               <a:rPr lang="zh-TW" altLang="en-US" smtClean="0"/>
-              <a:t>2026/3/18</a:t>
+              <a:t>2026/3/19</a:t>
             </a:fld>
             <a:endParaRPr lang="zh-TW" altLang="en-US"/>
           </a:p>
@@ -1399,7 +1405,7 @@
           <a:p>
             <a:fld id="{0DB1651F-564A-4748-8CCE-693AE295D293}" type="datetimeFigureOut">
               <a:rPr lang="zh-TW" altLang="en-US" smtClean="0"/>
-              <a:t>2026/3/18</a:t>
+              <a:t>2026/3/19</a:t>
             </a:fld>
             <a:endParaRPr lang="zh-TW" altLang="en-US"/>
           </a:p>
@@ -1811,7 +1817,7 @@
           <a:p>
             <a:fld id="{0DB1651F-564A-4748-8CCE-693AE295D293}" type="datetimeFigureOut">
               <a:rPr lang="zh-TW" altLang="en-US" smtClean="0"/>
-              <a:t>2026/3/18</a:t>
+              <a:t>2026/3/19</a:t>
             </a:fld>
             <a:endParaRPr lang="zh-TW" altLang="en-US"/>
           </a:p>
@@ -1952,7 +1958,7 @@
           <a:p>
             <a:fld id="{0DB1651F-564A-4748-8CCE-693AE295D293}" type="datetimeFigureOut">
               <a:rPr lang="zh-TW" altLang="en-US" smtClean="0"/>
-              <a:t>2026/3/18</a:t>
+              <a:t>2026/3/19</a:t>
             </a:fld>
             <a:endParaRPr lang="zh-TW" altLang="en-US"/>
           </a:p>
@@ -2065,7 +2071,7 @@
           <a:p>
             <a:fld id="{0DB1651F-564A-4748-8CCE-693AE295D293}" type="datetimeFigureOut">
               <a:rPr lang="zh-TW" altLang="en-US" smtClean="0"/>
-              <a:t>2026/3/18</a:t>
+              <a:t>2026/3/19</a:t>
             </a:fld>
             <a:endParaRPr lang="zh-TW" altLang="en-US"/>
           </a:p>
@@ -2376,7 +2382,7 @@
           <a:p>
             <a:fld id="{0DB1651F-564A-4748-8CCE-693AE295D293}" type="datetimeFigureOut">
               <a:rPr lang="zh-TW" altLang="en-US" smtClean="0"/>
-              <a:t>2026/3/18</a:t>
+              <a:t>2026/3/19</a:t>
             </a:fld>
             <a:endParaRPr lang="zh-TW" altLang="en-US"/>
           </a:p>
@@ -2664,7 +2670,7 @@
           <a:p>
             <a:fld id="{0DB1651F-564A-4748-8CCE-693AE295D293}" type="datetimeFigureOut">
               <a:rPr lang="zh-TW" altLang="en-US" smtClean="0"/>
-              <a:t>2026/3/18</a:t>
+              <a:t>2026/3/19</a:t>
             </a:fld>
             <a:endParaRPr lang="zh-TW" altLang="en-US"/>
           </a:p>
@@ -2905,7 +2911,7 @@
           <a:p>
             <a:fld id="{0DB1651F-564A-4748-8CCE-693AE295D293}" type="datetimeFigureOut">
               <a:rPr lang="zh-TW" altLang="en-US" smtClean="0"/>
-              <a:t>2026/3/18</a:t>
+              <a:t>2026/3/19</a:t>
             </a:fld>
             <a:endParaRPr lang="zh-TW" altLang="en-US"/>
           </a:p>
@@ -4777,10 +4783,214 @@
           <a:chExt cx="0" cy="0"/>
         </a:xfrm>
       </p:grpSpPr>
+      <p:sp>
+        <p:nvSpPr>
+          <p:cNvPr id="2" name="文字方塊 1">
+            <a:extLst>
+              <a:ext uri="{FF2B5EF4-FFF2-40B4-BE49-F238E27FC236}">
+                <a16:creationId xmlns:a16="http://schemas.microsoft.com/office/drawing/2014/main" id="{1A51C810-7F66-7CCA-9F24-09D481D0F87F}"/>
+              </a:ext>
+            </a:extLst>
+          </p:cNvPr>
+          <p:cNvSpPr txBox="1"/>
+          <p:nvPr/>
+        </p:nvSpPr>
+        <p:spPr>
+          <a:xfrm>
+            <a:off x="248479" y="268357"/>
+            <a:ext cx="2448106" cy="923330"/>
+          </a:xfrm>
+          <a:prstGeom prst="rect">
+            <a:avLst/>
+          </a:prstGeom>
+          <a:noFill/>
+        </p:spPr>
+        <p:txBody>
+          <a:bodyPr wrap="none" rtlCol="0">
+            <a:spAutoFit/>
+          </a:bodyPr>
+          <a:lstStyle/>
+          <a:p>
+            <a:r>
+              <a:rPr lang="zh-TW" altLang="en-US" dirty="0"/>
+              <a:t>配置輸出函數</a:t>
+            </a:r>
+            <a:endParaRPr lang="en-US" altLang="zh-TW" dirty="0"/>
+          </a:p>
+          <a:p>
+            <a:r>
+              <a:rPr lang="en-US" altLang="zh-TW" dirty="0" err="1"/>
+              <a:t>output_mode_setting</a:t>
+            </a:r>
+            <a:r>
+              <a:rPr lang="en-US" altLang="zh-TW" dirty="0"/>
+              <a:t>()</a:t>
+            </a:r>
+          </a:p>
+          <a:p>
+            <a:endParaRPr lang="zh-TW" altLang="en-US" dirty="0"/>
+          </a:p>
+        </p:txBody>
+      </p:sp>
+      <p:sp>
+        <p:nvSpPr>
+          <p:cNvPr id="3" name="矩形 2">
+            <a:extLst>
+              <a:ext uri="{FF2B5EF4-FFF2-40B4-BE49-F238E27FC236}">
+                <a16:creationId xmlns:a16="http://schemas.microsoft.com/office/drawing/2014/main" id="{57CE02D1-24F8-9109-2DD6-F9683D3CC338}"/>
+              </a:ext>
+            </a:extLst>
+          </p:cNvPr>
+          <p:cNvSpPr/>
+          <p:nvPr/>
+        </p:nvSpPr>
+        <p:spPr>
+          <a:xfrm>
+            <a:off x="3796748" y="1311965"/>
+            <a:ext cx="3011556" cy="347870"/>
+          </a:xfrm>
+          <a:prstGeom prst="rect">
+            <a:avLst/>
+          </a:prstGeom>
+        </p:spPr>
+        <p:style>
+          <a:lnRef idx="2">
+            <a:schemeClr val="dk1"/>
+          </a:lnRef>
+          <a:fillRef idx="1">
+            <a:schemeClr val="lt1"/>
+          </a:fillRef>
+          <a:effectRef idx="0">
+            <a:schemeClr val="dk1"/>
+          </a:effectRef>
+          <a:fontRef idx="minor">
+            <a:schemeClr val="dk1"/>
+          </a:fontRef>
+        </p:style>
+        <p:txBody>
+          <a:bodyPr rtlCol="0" anchor="ctr"/>
+          <a:lstStyle/>
+          <a:p>
+            <a:pPr algn="ctr"/>
+            <a:r>
+              <a:rPr lang="zh-TW" altLang="en-US" dirty="0"/>
+              <a:t>切換</a:t>
+            </a:r>
+            <a:r>
+              <a:rPr lang="en-US" altLang="zh-TW" dirty="0"/>
+              <a:t>CMD</a:t>
+            </a:r>
+            <a:r>
+              <a:rPr lang="zh-TW" altLang="en-US" dirty="0"/>
+              <a:t>，配置輸出函數</a:t>
+            </a:r>
+          </a:p>
+        </p:txBody>
+      </p:sp>
+      <p:sp>
+        <p:nvSpPr>
+          <p:cNvPr id="4" name="矩形 3">
+            <a:extLst>
+              <a:ext uri="{FF2B5EF4-FFF2-40B4-BE49-F238E27FC236}">
+                <a16:creationId xmlns:a16="http://schemas.microsoft.com/office/drawing/2014/main" id="{62D88A39-7D7D-D6BB-B4CC-62F180450F0C}"/>
+              </a:ext>
+            </a:extLst>
+          </p:cNvPr>
+          <p:cNvSpPr/>
+          <p:nvPr/>
+        </p:nvSpPr>
+        <p:spPr>
+          <a:xfrm>
+            <a:off x="3617843" y="2011018"/>
+            <a:ext cx="3508513" cy="347870"/>
+          </a:xfrm>
+          <a:prstGeom prst="rect">
+            <a:avLst/>
+          </a:prstGeom>
+        </p:spPr>
+        <p:style>
+          <a:lnRef idx="2">
+            <a:schemeClr val="dk1"/>
+          </a:lnRef>
+          <a:fillRef idx="1">
+            <a:schemeClr val="lt1"/>
+          </a:fillRef>
+          <a:effectRef idx="0">
+            <a:schemeClr val="dk1"/>
+          </a:effectRef>
+          <a:fontRef idx="minor">
+            <a:schemeClr val="dk1"/>
+          </a:fontRef>
+        </p:style>
+        <p:txBody>
+          <a:bodyPr rtlCol="0" anchor="ctr"/>
+          <a:lstStyle/>
+          <a:p>
+            <a:pPr algn="ctr"/>
+            <a:r>
+              <a:rPr lang="zh-TW" altLang="en-US" dirty="0"/>
+              <a:t>配置輸出函數鑰匙 </a:t>
+            </a:r>
+            <a:r>
+              <a:rPr lang="en-US" altLang="zh-TW" dirty="0" err="1"/>
+              <a:t>rx</a:t>
+            </a:r>
+            <a:r>
+              <a:rPr lang="en-US" altLang="zh-TW" dirty="0"/>
+              <a:t> -&gt;</a:t>
+            </a:r>
+            <a:r>
+              <a:rPr lang="zh-TW" altLang="en-US" dirty="0"/>
+              <a:t> </a:t>
+            </a:r>
+            <a:r>
+              <a:rPr lang="en-US" altLang="zh-TW" dirty="0" err="1"/>
+              <a:t>select_fn</a:t>
+            </a:r>
+            <a:endParaRPr lang="en-US" altLang="zh-TW" dirty="0"/>
+          </a:p>
+        </p:txBody>
+      </p:sp>
     </p:spTree>
     <p:extLst>
       <p:ext uri="{BB962C8B-B14F-4D97-AF65-F5344CB8AC3E}">
         <p14:creationId xmlns:p14="http://schemas.microsoft.com/office/powerpoint/2010/main" val="3851646998"/>
+      </p:ext>
+    </p:extLst>
+  </p:cSld>
+  <p:clrMapOvr>
+    <a:masterClrMapping/>
+  </p:clrMapOvr>
+</p:sld>
+</file>
+
+<file path=ppt/slides/slide3.xml><?xml version="1.0" encoding="utf-8"?>
+<p:sld xmlns:a="http://schemas.openxmlformats.org/drawingml/2006/main" xmlns:r="http://schemas.openxmlformats.org/officeDocument/2006/relationships" xmlns:p="http://schemas.openxmlformats.org/presentationml/2006/main">
+  <p:cSld>
+    <p:spTree>
+      <p:nvGrpSpPr>
+        <p:cNvPr id="1" name="">
+          <a:extLst>
+            <a:ext uri="{FF2B5EF4-FFF2-40B4-BE49-F238E27FC236}">
+              <a16:creationId xmlns:a16="http://schemas.microsoft.com/office/drawing/2014/main" id="{E0EDD238-5B0E-3DE4-1B21-86E110182C97}"/>
+            </a:ext>
+          </a:extLst>
+        </p:cNvPr>
+        <p:cNvGrpSpPr/>
+        <p:nvPr/>
+      </p:nvGrpSpPr>
+      <p:grpSpPr>
+        <a:xfrm>
+          <a:off x="0" y="0"/>
+          <a:ext cx="0" cy="0"/>
+          <a:chOff x="0" y="0"/>
+          <a:chExt cx="0" cy="0"/>
+        </a:xfrm>
+      </p:grpSpPr>
+    </p:spTree>
+    <p:extLst>
+      <p:ext uri="{BB962C8B-B14F-4D97-AF65-F5344CB8AC3E}">
+        <p14:creationId xmlns:p14="http://schemas.microsoft.com/office/powerpoint/2010/main" val="1833045937"/>
       </p:ext>
     </p:extLst>
   </p:cSld>
